--- a/courses/build/farmer-money/R-D2.zu.pptx
+++ b/courses/build/farmer-money/R-D2.zu.pptx
@@ -1955,7 +1955,7 @@
           </a:p>
           <a:p>
             <a:r>
-              <a:t>Clip R-ANI-07: public/course-animations/market-community/watch-04-farm-record.mp4</a:t>
+              <a:t>Clip R-ANI-07: public/course-media/farmer-money/R-ANI-07.mp4</a:t>
             </a:r>
           </a:p>
         </p:txBody>
